--- a/slides/8.Pointer_1/Pointer_1.pptx
+++ b/slides/8.Pointer_1/Pointer_1.pptx
@@ -14,8 +14,8 @@
     <p:sldId id="302" r:id="rId5"/>
     <p:sldId id="317" r:id="rId6"/>
     <p:sldId id="318" r:id="rId7"/>
-    <p:sldId id="319" r:id="rId8"/>
-    <p:sldId id="321" r:id="rId9"/>
+    <p:sldId id="324" r:id="rId8"/>
+    <p:sldId id="325" r:id="rId9"/>
     <p:sldId id="323" r:id="rId10"/>
     <p:sldId id="322" r:id="rId11"/>
     <p:sldId id="316" r:id="rId12"/>
@@ -1435,7 +1435,7 @@
         <p:cNvPr id="1" name="Shape 454">
           <a:extLst>
             <a:ext uri="{FF2B5EF4-FFF2-40B4-BE49-F238E27FC236}">
-              <a16:creationId xmlns:a16="http://schemas.microsoft.com/office/drawing/2014/main" id="{06350378-B4EE-BE17-51AB-B374721318D4}"/>
+              <a16:creationId xmlns:a16="http://schemas.microsoft.com/office/drawing/2014/main" id="{8F0ED45C-F65A-FC52-0C81-B73190DB4C4E}"/>
             </a:ext>
           </a:extLst>
         </p:cNvPr>
@@ -1455,7 +1455,7 @@
           <p:cNvPr id="455" name="Google Shape;455;ge7b5133482_0_0:notes">
             <a:extLst>
               <a:ext uri="{FF2B5EF4-FFF2-40B4-BE49-F238E27FC236}">
-                <a16:creationId xmlns:a16="http://schemas.microsoft.com/office/drawing/2014/main" id="{5FB3BDD9-980A-3DA6-F51B-C9A86DF24143}"/>
+                <a16:creationId xmlns:a16="http://schemas.microsoft.com/office/drawing/2014/main" id="{DF92C777-63B6-8E56-19E8-CABC2DC5FBEB}"/>
               </a:ext>
             </a:extLst>
           </p:cNvPr>
@@ -1502,7 +1502,7 @@
           <p:cNvPr id="456" name="Google Shape;456;ge7b5133482_0_0:notes">
             <a:extLst>
               <a:ext uri="{FF2B5EF4-FFF2-40B4-BE49-F238E27FC236}">
-                <a16:creationId xmlns:a16="http://schemas.microsoft.com/office/drawing/2014/main" id="{0C71DACE-CAB5-2CBB-78EE-4E9D1CAF83BE}"/>
+                <a16:creationId xmlns:a16="http://schemas.microsoft.com/office/drawing/2014/main" id="{747F28E4-16EF-61BC-2367-E000DF1AC039}"/>
               </a:ext>
             </a:extLst>
           </p:cNvPr>
@@ -1544,7 +1544,7 @@
     </p:spTree>
     <p:extLst>
       <p:ext uri="{BB962C8B-B14F-4D97-AF65-F5344CB8AC3E}">
-        <p14:creationId xmlns:p14="http://schemas.microsoft.com/office/powerpoint/2010/main" val="2074322067"/>
+        <p14:creationId xmlns:p14="http://schemas.microsoft.com/office/powerpoint/2010/main" val="1381201259"/>
       </p:ext>
     </p:extLst>
   </p:cSld>
@@ -1562,7 +1562,7 @@
         <p:cNvPr id="1" name="Shape 454">
           <a:extLst>
             <a:ext uri="{FF2B5EF4-FFF2-40B4-BE49-F238E27FC236}">
-              <a16:creationId xmlns:a16="http://schemas.microsoft.com/office/drawing/2014/main" id="{8E7175A0-34F4-7A57-1980-8F35A098C306}"/>
+              <a16:creationId xmlns:a16="http://schemas.microsoft.com/office/drawing/2014/main" id="{B935A26C-B712-1174-1145-23ECB32E0CFC}"/>
             </a:ext>
           </a:extLst>
         </p:cNvPr>
@@ -1582,7 +1582,7 @@
           <p:cNvPr id="455" name="Google Shape;455;ge7b5133482_0_0:notes">
             <a:extLst>
               <a:ext uri="{FF2B5EF4-FFF2-40B4-BE49-F238E27FC236}">
-                <a16:creationId xmlns:a16="http://schemas.microsoft.com/office/drawing/2014/main" id="{89DC85D2-D543-CE97-3D58-C0CF586E8531}"/>
+                <a16:creationId xmlns:a16="http://schemas.microsoft.com/office/drawing/2014/main" id="{FA550DA0-17D8-0A32-BD41-336DE9F76502}"/>
               </a:ext>
             </a:extLst>
           </p:cNvPr>
@@ -1629,7 +1629,7 @@
           <p:cNvPr id="456" name="Google Shape;456;ge7b5133482_0_0:notes">
             <a:extLst>
               <a:ext uri="{FF2B5EF4-FFF2-40B4-BE49-F238E27FC236}">
-                <a16:creationId xmlns:a16="http://schemas.microsoft.com/office/drawing/2014/main" id="{6A415ED5-8B20-A10C-908F-D6FEDD504166}"/>
+                <a16:creationId xmlns:a16="http://schemas.microsoft.com/office/drawing/2014/main" id="{482E57C8-12B9-A389-C4A3-B93361972D97}"/>
               </a:ext>
             </a:extLst>
           </p:cNvPr>
@@ -1671,7 +1671,7 @@
     </p:spTree>
     <p:extLst>
       <p:ext uri="{BB962C8B-B14F-4D97-AF65-F5344CB8AC3E}">
-        <p14:creationId xmlns:p14="http://schemas.microsoft.com/office/powerpoint/2010/main" val="2927628156"/>
+        <p14:creationId xmlns:p14="http://schemas.microsoft.com/office/powerpoint/2010/main" val="2072871130"/>
       </p:ext>
     </p:extLst>
   </p:cSld>
@@ -16622,7 +16622,7 @@
         <p:cNvPr id="1" name="Shape 457">
           <a:extLst>
             <a:ext uri="{FF2B5EF4-FFF2-40B4-BE49-F238E27FC236}">
-              <a16:creationId xmlns:a16="http://schemas.microsoft.com/office/drawing/2014/main" id="{B4AE3C7B-E844-44C4-5438-4D4389BD368F}"/>
+              <a16:creationId xmlns:a16="http://schemas.microsoft.com/office/drawing/2014/main" id="{F642FE5E-4311-0A70-75E3-11434734E32B}"/>
             </a:ext>
           </a:extLst>
         </p:cNvPr>
@@ -16642,7 +16642,7 @@
           <p:cNvPr id="465" name="Google Shape;465;p27">
             <a:extLst>
               <a:ext uri="{FF2B5EF4-FFF2-40B4-BE49-F238E27FC236}">
-                <a16:creationId xmlns:a16="http://schemas.microsoft.com/office/drawing/2014/main" id="{D91FC548-C6E8-20A2-98AF-7AE3DE296FE6}"/>
+                <a16:creationId xmlns:a16="http://schemas.microsoft.com/office/drawing/2014/main" id="{BC581DA4-F1BF-0111-3AAA-6C957B6E042D}"/>
               </a:ext>
             </a:extLst>
           </p:cNvPr>
@@ -16690,7 +16690,7 @@
           <p:cNvPr id="12" name="AutoShape 4">
             <a:extLst>
               <a:ext uri="{FF2B5EF4-FFF2-40B4-BE49-F238E27FC236}">
-                <a16:creationId xmlns:a16="http://schemas.microsoft.com/office/drawing/2014/main" id="{01528FDB-523F-60D9-EC66-72A0D466D836}"/>
+                <a16:creationId xmlns:a16="http://schemas.microsoft.com/office/drawing/2014/main" id="{600D3559-066E-8BC4-501B-30C0CA131CCB}"/>
               </a:ext>
             </a:extLst>
           </p:cNvPr>
@@ -16735,7 +16735,7 @@
           <p:cNvPr id="4" name="TextBox 3">
             <a:extLst>
               <a:ext uri="{FF2B5EF4-FFF2-40B4-BE49-F238E27FC236}">
-                <a16:creationId xmlns:a16="http://schemas.microsoft.com/office/drawing/2014/main" id="{07FDE0B6-745E-45D7-5621-11A2414CBA2F}"/>
+                <a16:creationId xmlns:a16="http://schemas.microsoft.com/office/drawing/2014/main" id="{72FE9C23-6599-ABFF-B442-13AE5345870C}"/>
               </a:ext>
             </a:extLst>
           </p:cNvPr>
@@ -16866,7 +16866,7 @@
           <p:cNvPr id="14" name="Google Shape;814;p39">
             <a:extLst>
               <a:ext uri="{FF2B5EF4-FFF2-40B4-BE49-F238E27FC236}">
-                <a16:creationId xmlns:a16="http://schemas.microsoft.com/office/drawing/2014/main" id="{DD0486A7-DC8E-35B7-302E-AC8D1944FC8A}"/>
+                <a16:creationId xmlns:a16="http://schemas.microsoft.com/office/drawing/2014/main" id="{E2445B35-F22E-40D7-4D48-90309B55E1E2}"/>
               </a:ext>
             </a:extLst>
           </p:cNvPr>
@@ -17156,7 +17156,7 @@
           <p:cNvPr id="6" name="Google Shape;473;p28">
             <a:extLst>
               <a:ext uri="{FF2B5EF4-FFF2-40B4-BE49-F238E27FC236}">
-                <a16:creationId xmlns:a16="http://schemas.microsoft.com/office/drawing/2014/main" id="{440A0E6F-7684-EFBD-A28B-A81C894D5D8D}"/>
+                <a16:creationId xmlns:a16="http://schemas.microsoft.com/office/drawing/2014/main" id="{CCE5E4A5-D124-A723-BB4D-B753507BCFC8}"/>
               </a:ext>
             </a:extLst>
           </p:cNvPr>
@@ -17450,7 +17450,7 @@
           <p:cNvPr id="7" name="Google Shape;473;p28">
             <a:extLst>
               <a:ext uri="{FF2B5EF4-FFF2-40B4-BE49-F238E27FC236}">
-                <a16:creationId xmlns:a16="http://schemas.microsoft.com/office/drawing/2014/main" id="{FABE45E8-60BC-EE19-1E7C-8F7576967CBB}"/>
+                <a16:creationId xmlns:a16="http://schemas.microsoft.com/office/drawing/2014/main" id="{082BEE52-CC60-D6DE-2C79-FB7D46DC5965}"/>
               </a:ext>
             </a:extLst>
           </p:cNvPr>
@@ -17749,7 +17749,7 @@
           <p:cNvPr id="10" name="TextBox 9">
             <a:extLst>
               <a:ext uri="{FF2B5EF4-FFF2-40B4-BE49-F238E27FC236}">
-                <a16:creationId xmlns:a16="http://schemas.microsoft.com/office/drawing/2014/main" id="{6EEF3FBA-6077-0860-5907-8F305F7FE593}"/>
+                <a16:creationId xmlns:a16="http://schemas.microsoft.com/office/drawing/2014/main" id="{BAE3417A-CBF2-6572-CDB1-0F42A5DCAEDF}"/>
               </a:ext>
             </a:extLst>
           </p:cNvPr>
@@ -17759,7 +17759,7 @@
         <p:spPr>
           <a:xfrm>
             <a:off x="1000153" y="2324590"/>
-            <a:ext cx="4248647" cy="830997"/>
+            <a:ext cx="4248647" cy="754053"/>
           </a:xfrm>
           <a:prstGeom prst="rect">
             <a:avLst/>
@@ -17816,54 +17816,26 @@
                 <a:schemeClr val="accent3"/>
               </a:buClr>
             </a:pPr>
-            <a:endParaRPr lang="en-US" sz="1600" dirty="0">
+            <a:endParaRPr lang="en-US" sz="1100" dirty="0">
               <a:solidFill>
-                <a:schemeClr val="accent3"/>
+                <a:schemeClr val="accent1">
+                  <a:lumMod val="75000"/>
+                </a:schemeClr>
               </a:solidFill>
-              <a:latin typeface="Fira Code"/>
-              <a:ea typeface="Fira Code"/>
-              <a:cs typeface="B Nazanin" panose="00000400000000000000" pitchFamily="2" charset="-78"/>
+              <a:latin typeface="Fira Code" panose="020B0809050000020004" pitchFamily="49" charset="0"/>
+              <a:ea typeface="Fira Code" panose="020B0809050000020004" pitchFamily="49" charset="0"/>
+              <a:cs typeface="Fira Code" panose="020B0809050000020004" pitchFamily="49" charset="0"/>
               <a:sym typeface="Fira Code"/>
             </a:endParaRPr>
           </a:p>
         </p:txBody>
       </p:sp>
-      <p:pic>
-        <p:nvPicPr>
-          <p:cNvPr id="5" name="Picture 4">
-            <a:extLst>
-              <a:ext uri="{FF2B5EF4-FFF2-40B4-BE49-F238E27FC236}">
-                <a16:creationId xmlns:a16="http://schemas.microsoft.com/office/drawing/2014/main" id="{9A990CE6-9FC7-F02D-F771-172EDE77D8C7}"/>
-              </a:ext>
-            </a:extLst>
-          </p:cNvPr>
-          <p:cNvPicPr>
-            <a:picLocks noChangeAspect="1"/>
-          </p:cNvPicPr>
-          <p:nvPr/>
-        </p:nvPicPr>
-        <p:blipFill>
-          <a:blip r:embed="rId3"/>
-          <a:stretch>
-            <a:fillRect/>
-          </a:stretch>
-        </p:blipFill>
-        <p:spPr>
-          <a:xfrm>
-            <a:off x="5368568" y="1596474"/>
-            <a:ext cx="3610479" cy="2191056"/>
-          </a:xfrm>
-          <a:prstGeom prst="rect">
-            <a:avLst/>
-          </a:prstGeom>
-        </p:spPr>
-      </p:pic>
       <p:sp>
         <p:nvSpPr>
           <p:cNvPr id="8" name="Google Shape;465;p27">
             <a:extLst>
               <a:ext uri="{FF2B5EF4-FFF2-40B4-BE49-F238E27FC236}">
-                <a16:creationId xmlns:a16="http://schemas.microsoft.com/office/drawing/2014/main" id="{572B2D53-BBFD-F609-F4C4-8DED2D9A173C}"/>
+                <a16:creationId xmlns:a16="http://schemas.microsoft.com/office/drawing/2014/main" id="{6BAF0F4C-153D-07B7-EC1B-25A89804245B}"/>
               </a:ext>
             </a:extLst>
           </p:cNvPr>
@@ -18145,10 +18117,268 @@
           </a:p>
         </p:txBody>
       </p:sp>
+      <p:sp>
+        <p:nvSpPr>
+          <p:cNvPr id="9" name="Rectangle: Rounded Corners 8">
+            <a:extLst>
+              <a:ext uri="{FF2B5EF4-FFF2-40B4-BE49-F238E27FC236}">
+                <a16:creationId xmlns:a16="http://schemas.microsoft.com/office/drawing/2014/main" id="{D65ED434-10F0-863B-DA01-7BEEE72B1189}"/>
+              </a:ext>
+            </a:extLst>
+          </p:cNvPr>
+          <p:cNvSpPr/>
+          <p:nvPr/>
+        </p:nvSpPr>
+        <p:spPr>
+          <a:xfrm>
+            <a:off x="5248800" y="1144107"/>
+            <a:ext cx="3504175" cy="1637193"/>
+          </a:xfrm>
+          <a:prstGeom prst="roundRect">
+            <a:avLst>
+              <a:gd name="adj" fmla="val 5419"/>
+            </a:avLst>
+          </a:prstGeom>
+          <a:solidFill>
+            <a:schemeClr val="accent5"/>
+          </a:solidFill>
+          <a:ln>
+            <a:noFill/>
+          </a:ln>
+        </p:spPr>
+        <p:style>
+          <a:lnRef idx="0">
+            <a:scrgbClr r="0" g="0" b="0"/>
+          </a:lnRef>
+          <a:fillRef idx="0">
+            <a:scrgbClr r="0" g="0" b="0"/>
+          </a:fillRef>
+          <a:effectRef idx="0">
+            <a:scrgbClr r="0" g="0" b="0"/>
+          </a:effectRef>
+          <a:fontRef idx="minor">
+            <a:schemeClr val="lt1"/>
+          </a:fontRef>
+        </p:style>
+        <p:txBody>
+          <a:bodyPr rtlCol="0" anchor="ctr"/>
+          <a:lstStyle/>
+          <a:p>
+            <a:r>
+              <a:rPr lang="en-US" sz="1100" dirty="0">
+                <a:solidFill>
+                  <a:schemeClr val="tx2"/>
+                </a:solidFill>
+                <a:latin typeface="Fira Code" panose="020B0809050000020004" pitchFamily="49" charset="0"/>
+                <a:ea typeface="Fira Code" panose="020B0809050000020004" pitchFamily="49" charset="0"/>
+                <a:cs typeface="Fira Code" panose="020B0809050000020004" pitchFamily="49" charset="0"/>
+              </a:rPr>
+              <a:t>int </a:t>
+            </a:r>
+            <a:r>
+              <a:rPr lang="en-US" sz="1100" dirty="0">
+                <a:solidFill>
+                  <a:schemeClr val="accent1">
+                    <a:lumMod val="75000"/>
+                  </a:schemeClr>
+                </a:solidFill>
+                <a:latin typeface="Fira Code" panose="020B0809050000020004" pitchFamily="49" charset="0"/>
+                <a:ea typeface="Fira Code" panose="020B0809050000020004" pitchFamily="49" charset="0"/>
+                <a:cs typeface="Fira Code" panose="020B0809050000020004" pitchFamily="49" charset="0"/>
+              </a:rPr>
+              <a:t>a[3] = {5, 10, 15};</a:t>
+            </a:r>
+          </a:p>
+          <a:p>
+            <a:r>
+              <a:rPr lang="en-US" sz="1100" dirty="0">
+                <a:solidFill>
+                  <a:schemeClr val="tx2"/>
+                </a:solidFill>
+                <a:latin typeface="Fira Code" panose="020B0809050000020004" pitchFamily="49" charset="0"/>
+                <a:ea typeface="Fira Code" panose="020B0809050000020004" pitchFamily="49" charset="0"/>
+                <a:cs typeface="Fira Code" panose="020B0809050000020004" pitchFamily="49" charset="0"/>
+              </a:rPr>
+              <a:t>int </a:t>
+            </a:r>
+            <a:r>
+              <a:rPr lang="en-US" sz="1100" dirty="0">
+                <a:solidFill>
+                  <a:schemeClr val="accent1">
+                    <a:lumMod val="75000"/>
+                  </a:schemeClr>
+                </a:solidFill>
+                <a:latin typeface="Fira Code" panose="020B0809050000020004" pitchFamily="49" charset="0"/>
+                <a:ea typeface="Fira Code" panose="020B0809050000020004" pitchFamily="49" charset="0"/>
+                <a:cs typeface="Fira Code" panose="020B0809050000020004" pitchFamily="49" charset="0"/>
+              </a:rPr>
+              <a:t>*p = a;</a:t>
+            </a:r>
+          </a:p>
+          <a:p>
+            <a:endParaRPr lang="en-US" sz="1100" dirty="0">
+              <a:solidFill>
+                <a:schemeClr val="tx2"/>
+              </a:solidFill>
+              <a:latin typeface="Fira Code" panose="020B0809050000020004" pitchFamily="49" charset="0"/>
+              <a:ea typeface="Fira Code" panose="020B0809050000020004" pitchFamily="49" charset="0"/>
+              <a:cs typeface="Fira Code" panose="020B0809050000020004" pitchFamily="49" charset="0"/>
+            </a:endParaRPr>
+          </a:p>
+          <a:p>
+            <a:r>
+              <a:rPr lang="en-US" sz="1100" dirty="0" err="1">
+                <a:solidFill>
+                  <a:schemeClr val="accent6"/>
+                </a:solidFill>
+                <a:latin typeface="Fira Code" panose="020B0809050000020004" pitchFamily="49" charset="0"/>
+                <a:ea typeface="Fira Code" panose="020B0809050000020004" pitchFamily="49" charset="0"/>
+                <a:cs typeface="Fira Code" panose="020B0809050000020004" pitchFamily="49" charset="0"/>
+              </a:rPr>
+              <a:t>printf</a:t>
+            </a:r>
+            <a:r>
+              <a:rPr lang="en-US" sz="1100" dirty="0">
+                <a:solidFill>
+                  <a:schemeClr val="accent1">
+                    <a:lumMod val="75000"/>
+                  </a:schemeClr>
+                </a:solidFill>
+                <a:latin typeface="Fira Code" panose="020B0809050000020004" pitchFamily="49" charset="0"/>
+                <a:ea typeface="Fira Code" panose="020B0809050000020004" pitchFamily="49" charset="0"/>
+                <a:cs typeface="Fira Code" panose="020B0809050000020004" pitchFamily="49" charset="0"/>
+              </a:rPr>
+              <a:t>("%d", *p);       </a:t>
+            </a:r>
+            <a:r>
+              <a:rPr lang="en-US" sz="1100" dirty="0">
+                <a:solidFill>
+                  <a:schemeClr val="tx2"/>
+                </a:solidFill>
+                <a:latin typeface="Fira Code" panose="020B0809050000020004" pitchFamily="49" charset="0"/>
+                <a:ea typeface="Fira Code" panose="020B0809050000020004" pitchFamily="49" charset="0"/>
+                <a:cs typeface="Fira Code" panose="020B0809050000020004" pitchFamily="49" charset="0"/>
+              </a:rPr>
+              <a:t>// ?</a:t>
+            </a:r>
+          </a:p>
+          <a:p>
+            <a:r>
+              <a:rPr lang="en-US" sz="1100" dirty="0" err="1">
+                <a:solidFill>
+                  <a:schemeClr val="accent6"/>
+                </a:solidFill>
+                <a:latin typeface="Fira Code" panose="020B0809050000020004" pitchFamily="49" charset="0"/>
+                <a:ea typeface="Fira Code" panose="020B0809050000020004" pitchFamily="49" charset="0"/>
+                <a:cs typeface="Fira Code" panose="020B0809050000020004" pitchFamily="49" charset="0"/>
+              </a:rPr>
+              <a:t>printf</a:t>
+            </a:r>
+            <a:r>
+              <a:rPr lang="en-US" sz="1100" dirty="0">
+                <a:solidFill>
+                  <a:schemeClr val="accent1">
+                    <a:lumMod val="75000"/>
+                  </a:schemeClr>
+                </a:solidFill>
+                <a:latin typeface="Fira Code" panose="020B0809050000020004" pitchFamily="49" charset="0"/>
+                <a:ea typeface="Fira Code" panose="020B0809050000020004" pitchFamily="49" charset="0"/>
+                <a:cs typeface="Fira Code" panose="020B0809050000020004" pitchFamily="49" charset="0"/>
+              </a:rPr>
+              <a:t>("%d", *(p+1));   </a:t>
+            </a:r>
+            <a:r>
+              <a:rPr lang="en-US" sz="1100" dirty="0">
+                <a:solidFill>
+                  <a:schemeClr val="tx2"/>
+                </a:solidFill>
+                <a:latin typeface="Fira Code" panose="020B0809050000020004" pitchFamily="49" charset="0"/>
+                <a:ea typeface="Fira Code" panose="020B0809050000020004" pitchFamily="49" charset="0"/>
+                <a:cs typeface="Fira Code" panose="020B0809050000020004" pitchFamily="49" charset="0"/>
+              </a:rPr>
+              <a:t>// ?</a:t>
+            </a:r>
+          </a:p>
+          <a:p>
+            <a:r>
+              <a:rPr lang="en-US" sz="1100" dirty="0" err="1">
+                <a:solidFill>
+                  <a:schemeClr val="accent6"/>
+                </a:solidFill>
+                <a:latin typeface="Fira Code" panose="020B0809050000020004" pitchFamily="49" charset="0"/>
+                <a:ea typeface="Fira Code" panose="020B0809050000020004" pitchFamily="49" charset="0"/>
+                <a:cs typeface="Fira Code" panose="020B0809050000020004" pitchFamily="49" charset="0"/>
+              </a:rPr>
+              <a:t>printf</a:t>
+            </a:r>
+            <a:r>
+              <a:rPr lang="en-US" sz="1100" dirty="0">
+                <a:solidFill>
+                  <a:schemeClr val="accent1">
+                    <a:lumMod val="75000"/>
+                  </a:schemeClr>
+                </a:solidFill>
+                <a:latin typeface="Fira Code" panose="020B0809050000020004" pitchFamily="49" charset="0"/>
+                <a:ea typeface="Fira Code" panose="020B0809050000020004" pitchFamily="49" charset="0"/>
+                <a:cs typeface="Fira Code" panose="020B0809050000020004" pitchFamily="49" charset="0"/>
+              </a:rPr>
+              <a:t>("%p", &amp;a);       </a:t>
+            </a:r>
+            <a:r>
+              <a:rPr lang="en-US" sz="1100" dirty="0">
+                <a:solidFill>
+                  <a:schemeClr val="tx2"/>
+                </a:solidFill>
+                <a:latin typeface="Fira Code" panose="020B0809050000020004" pitchFamily="49" charset="0"/>
+                <a:ea typeface="Fira Code" panose="020B0809050000020004" pitchFamily="49" charset="0"/>
+                <a:cs typeface="Fira Code" panose="020B0809050000020004" pitchFamily="49" charset="0"/>
+              </a:rPr>
+              <a:t>// ?</a:t>
+            </a:r>
+          </a:p>
+          <a:p>
+            <a:r>
+              <a:rPr lang="en-US" sz="1100" dirty="0" err="1">
+                <a:solidFill>
+                  <a:schemeClr val="accent6"/>
+                </a:solidFill>
+                <a:latin typeface="Fira Code" panose="020B0809050000020004" pitchFamily="49" charset="0"/>
+                <a:ea typeface="Fira Code" panose="020B0809050000020004" pitchFamily="49" charset="0"/>
+                <a:cs typeface="Fira Code" panose="020B0809050000020004" pitchFamily="49" charset="0"/>
+              </a:rPr>
+              <a:t>printf</a:t>
+            </a:r>
+            <a:r>
+              <a:rPr lang="en-US" sz="1100" dirty="0">
+                <a:solidFill>
+                  <a:schemeClr val="accent1">
+                    <a:lumMod val="75000"/>
+                  </a:schemeClr>
+                </a:solidFill>
+                <a:latin typeface="Fira Code" panose="020B0809050000020004" pitchFamily="49" charset="0"/>
+                <a:ea typeface="Fira Code" panose="020B0809050000020004" pitchFamily="49" charset="0"/>
+                <a:cs typeface="Fira Code" panose="020B0809050000020004" pitchFamily="49" charset="0"/>
+              </a:rPr>
+              <a:t>("%p", &amp;a[0]);    </a:t>
+            </a:r>
+            <a:r>
+              <a:rPr lang="en-US" sz="1100" dirty="0">
+                <a:solidFill>
+                  <a:schemeClr val="tx2"/>
+                </a:solidFill>
+                <a:latin typeface="Fira Code" panose="020B0809050000020004" pitchFamily="49" charset="0"/>
+                <a:ea typeface="Fira Code" panose="020B0809050000020004" pitchFamily="49" charset="0"/>
+                <a:cs typeface="Fira Code" panose="020B0809050000020004" pitchFamily="49" charset="0"/>
+              </a:rPr>
+              <a:t>// ?</a:t>
+            </a:r>
+          </a:p>
+        </p:txBody>
+      </p:sp>
     </p:spTree>
     <p:extLst>
       <p:ext uri="{BB962C8B-B14F-4D97-AF65-F5344CB8AC3E}">
-        <p14:creationId xmlns:p14="http://schemas.microsoft.com/office/powerpoint/2010/main" val="3702948159"/>
+        <p14:creationId xmlns:p14="http://schemas.microsoft.com/office/powerpoint/2010/main" val="2878205122"/>
       </p:ext>
     </p:extLst>
   </p:cSld>
@@ -18166,7 +18396,7 @@
         <p:cNvPr id="1" name="Shape 457">
           <a:extLst>
             <a:ext uri="{FF2B5EF4-FFF2-40B4-BE49-F238E27FC236}">
-              <a16:creationId xmlns:a16="http://schemas.microsoft.com/office/drawing/2014/main" id="{2C7DC779-ECE7-E8D5-7452-71343CC543F1}"/>
+              <a16:creationId xmlns:a16="http://schemas.microsoft.com/office/drawing/2014/main" id="{018400E6-2537-869D-3160-458B18886087}"/>
             </a:ext>
           </a:extLst>
         </p:cNvPr>
@@ -18186,7 +18416,7 @@
           <p:cNvPr id="465" name="Google Shape;465;p27">
             <a:extLst>
               <a:ext uri="{FF2B5EF4-FFF2-40B4-BE49-F238E27FC236}">
-                <a16:creationId xmlns:a16="http://schemas.microsoft.com/office/drawing/2014/main" id="{06E0ADD8-DF97-A77E-3E7B-F1B3B864CDC6}"/>
+                <a16:creationId xmlns:a16="http://schemas.microsoft.com/office/drawing/2014/main" id="{C728C645-D720-4265-6746-B296FBAB14B1}"/>
               </a:ext>
             </a:extLst>
           </p:cNvPr>
@@ -18234,7 +18464,7 @@
           <p:cNvPr id="12" name="AutoShape 4">
             <a:extLst>
               <a:ext uri="{FF2B5EF4-FFF2-40B4-BE49-F238E27FC236}">
-                <a16:creationId xmlns:a16="http://schemas.microsoft.com/office/drawing/2014/main" id="{B96C66EA-0B85-3CBD-69FF-E0A85C41D171}"/>
+                <a16:creationId xmlns:a16="http://schemas.microsoft.com/office/drawing/2014/main" id="{6DFB5B6B-193F-A278-D7DD-70253236E316}"/>
               </a:ext>
             </a:extLst>
           </p:cNvPr>
@@ -18279,7 +18509,7 @@
           <p:cNvPr id="4" name="TextBox 3">
             <a:extLst>
               <a:ext uri="{FF2B5EF4-FFF2-40B4-BE49-F238E27FC236}">
-                <a16:creationId xmlns:a16="http://schemas.microsoft.com/office/drawing/2014/main" id="{68EBA291-8C3A-5F1C-9701-0BC4AC882D01}"/>
+                <a16:creationId xmlns:a16="http://schemas.microsoft.com/office/drawing/2014/main" id="{6796DE7B-B3EF-D614-6BC8-D3002D0880ED}"/>
               </a:ext>
             </a:extLst>
           </p:cNvPr>
@@ -18478,7 +18708,7 @@
           <p:cNvPr id="14" name="Google Shape;814;p39">
             <a:extLst>
               <a:ext uri="{FF2B5EF4-FFF2-40B4-BE49-F238E27FC236}">
-                <a16:creationId xmlns:a16="http://schemas.microsoft.com/office/drawing/2014/main" id="{082FC996-F4B4-683A-0E66-2ABF4BA6100E}"/>
+                <a16:creationId xmlns:a16="http://schemas.microsoft.com/office/drawing/2014/main" id="{FB76AA86-A1D3-6596-A8B1-9BC4266B7DA0}"/>
               </a:ext>
             </a:extLst>
           </p:cNvPr>
@@ -18768,7 +18998,7 @@
           <p:cNvPr id="6" name="Google Shape;473;p28">
             <a:extLst>
               <a:ext uri="{FF2B5EF4-FFF2-40B4-BE49-F238E27FC236}">
-                <a16:creationId xmlns:a16="http://schemas.microsoft.com/office/drawing/2014/main" id="{BF513711-14A3-1347-11F8-18559EB95F41}"/>
+                <a16:creationId xmlns:a16="http://schemas.microsoft.com/office/drawing/2014/main" id="{63BED803-8C68-DB07-B2E0-CB244B9161E0}"/>
               </a:ext>
             </a:extLst>
           </p:cNvPr>
@@ -19062,7 +19292,7 @@
           <p:cNvPr id="7" name="Google Shape;473;p28">
             <a:extLst>
               <a:ext uri="{FF2B5EF4-FFF2-40B4-BE49-F238E27FC236}">
-                <a16:creationId xmlns:a16="http://schemas.microsoft.com/office/drawing/2014/main" id="{C4FBF0E7-B769-FFC9-81DF-66D83E75D9B1}"/>
+                <a16:creationId xmlns:a16="http://schemas.microsoft.com/office/drawing/2014/main" id="{97BB45CB-439C-B062-A26E-2BEEB1031D6A}"/>
               </a:ext>
             </a:extLst>
           </p:cNvPr>
@@ -19361,7 +19591,7 @@
           <p:cNvPr id="2" name="Google Shape;465;p27">
             <a:extLst>
               <a:ext uri="{FF2B5EF4-FFF2-40B4-BE49-F238E27FC236}">
-                <a16:creationId xmlns:a16="http://schemas.microsoft.com/office/drawing/2014/main" id="{AE87ABCC-3872-798B-F27E-445C5B472703}"/>
+                <a16:creationId xmlns:a16="http://schemas.microsoft.com/office/drawing/2014/main" id="{3CD76E71-EA6A-F4EC-EC43-CA20C324C059}"/>
               </a:ext>
             </a:extLst>
           </p:cNvPr>
@@ -19643,40 +19873,395 @@
           </a:p>
         </p:txBody>
       </p:sp>
-      <p:pic>
-        <p:nvPicPr>
-          <p:cNvPr id="5" name="Picture 4">
+      <p:sp>
+        <p:nvSpPr>
+          <p:cNvPr id="10" name="Rectangle: Rounded Corners 9">
             <a:extLst>
               <a:ext uri="{FF2B5EF4-FFF2-40B4-BE49-F238E27FC236}">
-                <a16:creationId xmlns:a16="http://schemas.microsoft.com/office/drawing/2014/main" id="{78ED46FC-6F32-95E9-69DB-93D2FA25182C}"/>
+                <a16:creationId xmlns:a16="http://schemas.microsoft.com/office/drawing/2014/main" id="{D44804EA-C9EC-655F-5B9B-BAD513C13B7E}"/>
               </a:ext>
             </a:extLst>
           </p:cNvPr>
-          <p:cNvPicPr>
-            <a:picLocks noChangeAspect="1"/>
-          </p:cNvPicPr>
+          <p:cNvSpPr/>
           <p:nvPr/>
-        </p:nvPicPr>
-        <p:blipFill>
-          <a:blip r:embed="rId3"/>
-          <a:stretch>
-            <a:fillRect/>
-          </a:stretch>
-        </p:blipFill>
+        </p:nvSpPr>
         <p:spPr>
           <a:xfrm>
-            <a:off x="5329158" y="1170406"/>
-            <a:ext cx="3657359" cy="2078756"/>
+            <a:off x="4913274" y="1423634"/>
+            <a:ext cx="4030503" cy="2248284"/>
           </a:xfrm>
-          <a:prstGeom prst="rect">
-            <a:avLst/>
+          <a:prstGeom prst="roundRect">
+            <a:avLst>
+              <a:gd name="adj" fmla="val 5419"/>
+            </a:avLst>
           </a:prstGeom>
+          <a:solidFill>
+            <a:schemeClr val="accent5"/>
+          </a:solidFill>
+          <a:ln>
+            <a:noFill/>
+          </a:ln>
         </p:spPr>
-      </p:pic>
+        <p:style>
+          <a:lnRef idx="0">
+            <a:scrgbClr r="0" g="0" b="0"/>
+          </a:lnRef>
+          <a:fillRef idx="0">
+            <a:scrgbClr r="0" g="0" b="0"/>
+          </a:fillRef>
+          <a:effectRef idx="0">
+            <a:scrgbClr r="0" g="0" b="0"/>
+          </a:effectRef>
+          <a:fontRef idx="minor">
+            <a:schemeClr val="lt1"/>
+          </a:fontRef>
+        </p:style>
+        <p:txBody>
+          <a:bodyPr rtlCol="0" anchor="ctr"/>
+          <a:lstStyle/>
+          <a:p>
+            <a:r>
+              <a:rPr lang="en-US" sz="1000" dirty="0">
+                <a:solidFill>
+                  <a:schemeClr val="tx2"/>
+                </a:solidFill>
+                <a:latin typeface="Fira Code" panose="020B0809050000020004" pitchFamily="49" charset="0"/>
+                <a:ea typeface="Fira Code" panose="020B0809050000020004" pitchFamily="49" charset="0"/>
+                <a:cs typeface="Fira Code" panose="020B0809050000020004" pitchFamily="49" charset="0"/>
+              </a:rPr>
+              <a:t>int main()</a:t>
+            </a:r>
+          </a:p>
+          <a:p>
+            <a:r>
+              <a:rPr lang="en-US" sz="1000" dirty="0">
+                <a:solidFill>
+                  <a:schemeClr val="tx2"/>
+                </a:solidFill>
+                <a:latin typeface="Fira Code" panose="020B0809050000020004" pitchFamily="49" charset="0"/>
+                <a:ea typeface="Fira Code" panose="020B0809050000020004" pitchFamily="49" charset="0"/>
+                <a:cs typeface="Fira Code" panose="020B0809050000020004" pitchFamily="49" charset="0"/>
+              </a:rPr>
+              <a:t>{</a:t>
+            </a:r>
+          </a:p>
+          <a:p>
+            <a:r>
+              <a:rPr lang="en-US" sz="1000" dirty="0">
+                <a:solidFill>
+                  <a:schemeClr val="tx2"/>
+                </a:solidFill>
+                <a:latin typeface="Fira Code" panose="020B0809050000020004" pitchFamily="49" charset="0"/>
+                <a:ea typeface="Fira Code" panose="020B0809050000020004" pitchFamily="49" charset="0"/>
+                <a:cs typeface="Fira Code" panose="020B0809050000020004" pitchFamily="49" charset="0"/>
+              </a:rPr>
+              <a:t>    int a[5] = </a:t>
+            </a:r>
+            <a:r>
+              <a:rPr lang="en-US" sz="1100" dirty="0">
+                <a:solidFill>
+                  <a:schemeClr val="accent1">
+                    <a:lumMod val="75000"/>
+                  </a:schemeClr>
+                </a:solidFill>
+                <a:latin typeface="Fira Code" panose="020B0809050000020004" pitchFamily="49" charset="0"/>
+                <a:ea typeface="Fira Code" panose="020B0809050000020004" pitchFamily="49" charset="0"/>
+                <a:cs typeface="Fira Code" panose="020B0809050000020004" pitchFamily="49" charset="0"/>
+              </a:rPr>
+              <a:t>{1, 2, 3, 4, 5};</a:t>
+            </a:r>
+          </a:p>
+          <a:p>
+            <a:r>
+              <a:rPr lang="en-US" sz="1000" dirty="0">
+                <a:solidFill>
+                  <a:schemeClr val="tx2"/>
+                </a:solidFill>
+                <a:latin typeface="Fira Code" panose="020B0809050000020004" pitchFamily="49" charset="0"/>
+                <a:ea typeface="Fira Code" panose="020B0809050000020004" pitchFamily="49" charset="0"/>
+                <a:cs typeface="Fira Code" panose="020B0809050000020004" pitchFamily="49" charset="0"/>
+              </a:rPr>
+              <a:t>    </a:t>
+            </a:r>
+            <a:r>
+              <a:rPr lang="en-US" sz="1100" dirty="0" err="1">
+                <a:solidFill>
+                  <a:schemeClr val="accent6"/>
+                </a:solidFill>
+                <a:latin typeface="Fira Code" panose="020B0809050000020004" pitchFamily="49" charset="0"/>
+                <a:ea typeface="Fira Code" panose="020B0809050000020004" pitchFamily="49" charset="0"/>
+                <a:cs typeface="Fira Code" panose="020B0809050000020004" pitchFamily="49" charset="0"/>
+              </a:rPr>
+              <a:t>printf</a:t>
+            </a:r>
+            <a:r>
+              <a:rPr lang="en-US" sz="1100" dirty="0">
+                <a:solidFill>
+                  <a:schemeClr val="accent1">
+                    <a:lumMod val="75000"/>
+                  </a:schemeClr>
+                </a:solidFill>
+                <a:latin typeface="Fira Code" panose="020B0809050000020004" pitchFamily="49" charset="0"/>
+                <a:ea typeface="Fira Code" panose="020B0809050000020004" pitchFamily="49" charset="0"/>
+                <a:cs typeface="Fira Code" panose="020B0809050000020004" pitchFamily="49" charset="0"/>
+              </a:rPr>
+              <a:t>("%</a:t>
+            </a:r>
+            <a:r>
+              <a:rPr lang="en-US" sz="1100" dirty="0" err="1">
+                <a:solidFill>
+                  <a:schemeClr val="accent1">
+                    <a:lumMod val="75000"/>
+                  </a:schemeClr>
+                </a:solidFill>
+                <a:latin typeface="Fira Code" panose="020B0809050000020004" pitchFamily="49" charset="0"/>
+                <a:ea typeface="Fira Code" panose="020B0809050000020004" pitchFamily="49" charset="0"/>
+                <a:cs typeface="Fira Code" panose="020B0809050000020004" pitchFamily="49" charset="0"/>
+              </a:rPr>
+              <a:t>lu</a:t>
+            </a:r>
+            <a:r>
+              <a:rPr lang="en-US" sz="1100" dirty="0">
+                <a:solidFill>
+                  <a:schemeClr val="accent1">
+                    <a:lumMod val="75000"/>
+                  </a:schemeClr>
+                </a:solidFill>
+                <a:latin typeface="Fira Code" panose="020B0809050000020004" pitchFamily="49" charset="0"/>
+                <a:ea typeface="Fira Code" panose="020B0809050000020004" pitchFamily="49" charset="0"/>
+                <a:cs typeface="Fira Code" panose="020B0809050000020004" pitchFamily="49" charset="0"/>
+              </a:rPr>
+              <a:t>\n", </a:t>
+            </a:r>
+            <a:r>
+              <a:rPr lang="en-US" sz="1100" dirty="0" err="1">
+                <a:solidFill>
+                  <a:schemeClr val="accent1">
+                    <a:lumMod val="75000"/>
+                  </a:schemeClr>
+                </a:solidFill>
+                <a:latin typeface="Fira Code" panose="020B0809050000020004" pitchFamily="49" charset="0"/>
+                <a:ea typeface="Fira Code" panose="020B0809050000020004" pitchFamily="49" charset="0"/>
+                <a:cs typeface="Fira Code" panose="020B0809050000020004" pitchFamily="49" charset="0"/>
+              </a:rPr>
+              <a:t>sizeof</a:t>
+            </a:r>
+            <a:r>
+              <a:rPr lang="en-US" sz="1100" dirty="0">
+                <a:solidFill>
+                  <a:schemeClr val="accent1">
+                    <a:lumMod val="75000"/>
+                  </a:schemeClr>
+                </a:solidFill>
+                <a:latin typeface="Fira Code" panose="020B0809050000020004" pitchFamily="49" charset="0"/>
+                <a:ea typeface="Fira Code" panose="020B0809050000020004" pitchFamily="49" charset="0"/>
+                <a:cs typeface="Fira Code" panose="020B0809050000020004" pitchFamily="49" charset="0"/>
+              </a:rPr>
+              <a:t>(a));</a:t>
+            </a:r>
+          </a:p>
+          <a:p>
+            <a:r>
+              <a:rPr lang="en-US" sz="1000" dirty="0">
+                <a:solidFill>
+                  <a:schemeClr val="tx2"/>
+                </a:solidFill>
+                <a:latin typeface="Fira Code" panose="020B0809050000020004" pitchFamily="49" charset="0"/>
+                <a:ea typeface="Fira Code" panose="020B0809050000020004" pitchFamily="49" charset="0"/>
+                <a:cs typeface="Fira Code" panose="020B0809050000020004" pitchFamily="49" charset="0"/>
+              </a:rPr>
+              <a:t>    int *</a:t>
+            </a:r>
+            <a:r>
+              <a:rPr lang="en-US" sz="1000" dirty="0" err="1">
+                <a:solidFill>
+                  <a:schemeClr val="tx2"/>
+                </a:solidFill>
+                <a:latin typeface="Fira Code" panose="020B0809050000020004" pitchFamily="49" charset="0"/>
+                <a:ea typeface="Fira Code" panose="020B0809050000020004" pitchFamily="49" charset="0"/>
+                <a:cs typeface="Fira Code" panose="020B0809050000020004" pitchFamily="49" charset="0"/>
+              </a:rPr>
+              <a:t>ptr</a:t>
+            </a:r>
+            <a:r>
+              <a:rPr lang="en-US" sz="1000" dirty="0">
+                <a:solidFill>
+                  <a:schemeClr val="tx2"/>
+                </a:solidFill>
+                <a:latin typeface="Fira Code" panose="020B0809050000020004" pitchFamily="49" charset="0"/>
+                <a:ea typeface="Fira Code" panose="020B0809050000020004" pitchFamily="49" charset="0"/>
+                <a:cs typeface="Fira Code" panose="020B0809050000020004" pitchFamily="49" charset="0"/>
+              </a:rPr>
+              <a:t> = </a:t>
+            </a:r>
+            <a:r>
+              <a:rPr lang="en-US" sz="1100" dirty="0">
+                <a:solidFill>
+                  <a:schemeClr val="accent1">
+                    <a:lumMod val="75000"/>
+                  </a:schemeClr>
+                </a:solidFill>
+                <a:latin typeface="Fira Code" panose="020B0809050000020004" pitchFamily="49" charset="0"/>
+                <a:ea typeface="Fira Code" panose="020B0809050000020004" pitchFamily="49" charset="0"/>
+                <a:cs typeface="Fira Code" panose="020B0809050000020004" pitchFamily="49" charset="0"/>
+              </a:rPr>
+              <a:t>(int *)( &amp;a + 1 );</a:t>
+            </a:r>
+          </a:p>
+          <a:p>
+            <a:endParaRPr lang="en-US" sz="1100" dirty="0">
+              <a:solidFill>
+                <a:schemeClr val="accent1">
+                  <a:lumMod val="75000"/>
+                </a:schemeClr>
+              </a:solidFill>
+              <a:latin typeface="Fira Code" panose="020B0809050000020004" pitchFamily="49" charset="0"/>
+              <a:ea typeface="Fira Code" panose="020B0809050000020004" pitchFamily="49" charset="0"/>
+              <a:cs typeface="Fira Code" panose="020B0809050000020004" pitchFamily="49" charset="0"/>
+            </a:endParaRPr>
+          </a:p>
+          <a:p>
+            <a:r>
+              <a:rPr lang="en-US" sz="1000" dirty="0">
+                <a:solidFill>
+                  <a:schemeClr val="tx2"/>
+                </a:solidFill>
+                <a:latin typeface="Fira Code" panose="020B0809050000020004" pitchFamily="49" charset="0"/>
+                <a:ea typeface="Fira Code" panose="020B0809050000020004" pitchFamily="49" charset="0"/>
+                <a:cs typeface="Fira Code" panose="020B0809050000020004" pitchFamily="49" charset="0"/>
+              </a:rPr>
+              <a:t>    </a:t>
+            </a:r>
+            <a:r>
+              <a:rPr lang="en-US" sz="1100" dirty="0" err="1">
+                <a:solidFill>
+                  <a:schemeClr val="accent6"/>
+                </a:solidFill>
+                <a:latin typeface="Fira Code" panose="020B0809050000020004" pitchFamily="49" charset="0"/>
+                <a:ea typeface="Fira Code" panose="020B0809050000020004" pitchFamily="49" charset="0"/>
+                <a:cs typeface="Fira Code" panose="020B0809050000020004" pitchFamily="49" charset="0"/>
+              </a:rPr>
+              <a:t>printf</a:t>
+            </a:r>
+            <a:r>
+              <a:rPr lang="en-US" sz="1100" dirty="0">
+                <a:solidFill>
+                  <a:schemeClr val="accent1">
+                    <a:lumMod val="75000"/>
+                  </a:schemeClr>
+                </a:solidFill>
+                <a:latin typeface="Fira Code" panose="020B0809050000020004" pitchFamily="49" charset="0"/>
+                <a:ea typeface="Fira Code" panose="020B0809050000020004" pitchFamily="49" charset="0"/>
+                <a:cs typeface="Fira Code" panose="020B0809050000020004" pitchFamily="49" charset="0"/>
+              </a:rPr>
+              <a:t>("%d %d\n", *(a + 1), *(</a:t>
+            </a:r>
+            <a:r>
+              <a:rPr lang="en-US" sz="1100" dirty="0" err="1">
+                <a:solidFill>
+                  <a:schemeClr val="accent1">
+                    <a:lumMod val="75000"/>
+                  </a:schemeClr>
+                </a:solidFill>
+                <a:latin typeface="Fira Code" panose="020B0809050000020004" pitchFamily="49" charset="0"/>
+                <a:ea typeface="Fira Code" panose="020B0809050000020004" pitchFamily="49" charset="0"/>
+                <a:cs typeface="Fira Code" panose="020B0809050000020004" pitchFamily="49" charset="0"/>
+              </a:rPr>
+              <a:t>ptr</a:t>
+            </a:r>
+            <a:r>
+              <a:rPr lang="en-US" sz="1100" dirty="0">
+                <a:solidFill>
+                  <a:schemeClr val="accent1">
+                    <a:lumMod val="75000"/>
+                  </a:schemeClr>
+                </a:solidFill>
+                <a:latin typeface="Fira Code" panose="020B0809050000020004" pitchFamily="49" charset="0"/>
+                <a:ea typeface="Fira Code" panose="020B0809050000020004" pitchFamily="49" charset="0"/>
+                <a:cs typeface="Fira Code" panose="020B0809050000020004" pitchFamily="49" charset="0"/>
+              </a:rPr>
+              <a:t> - 1));</a:t>
+            </a:r>
+          </a:p>
+          <a:p>
+            <a:endParaRPr lang="en-US" sz="1100" dirty="0">
+              <a:solidFill>
+                <a:schemeClr val="accent1">
+                  <a:lumMod val="75000"/>
+                </a:schemeClr>
+              </a:solidFill>
+              <a:latin typeface="Fira Code" panose="020B0809050000020004" pitchFamily="49" charset="0"/>
+              <a:ea typeface="Fira Code" panose="020B0809050000020004" pitchFamily="49" charset="0"/>
+              <a:cs typeface="Fira Code" panose="020B0809050000020004" pitchFamily="49" charset="0"/>
+            </a:endParaRPr>
+          </a:p>
+          <a:p>
+            <a:r>
+              <a:rPr lang="en-US" sz="1000" dirty="0">
+                <a:solidFill>
+                  <a:schemeClr val="tx2"/>
+                </a:solidFill>
+                <a:latin typeface="Fira Code" panose="020B0809050000020004" pitchFamily="49" charset="0"/>
+                <a:ea typeface="Fira Code" panose="020B0809050000020004" pitchFamily="49" charset="0"/>
+                <a:cs typeface="Fira Code" panose="020B0809050000020004" pitchFamily="49" charset="0"/>
+              </a:rPr>
+              <a:t>    </a:t>
+            </a:r>
+            <a:r>
+              <a:rPr lang="en-US" sz="1100" dirty="0">
+                <a:solidFill>
+                  <a:schemeClr val="accent6"/>
+                </a:solidFill>
+                <a:latin typeface="Fira Code" panose="020B0809050000020004" pitchFamily="49" charset="0"/>
+                <a:ea typeface="Fira Code" panose="020B0809050000020004" pitchFamily="49" charset="0"/>
+                <a:cs typeface="Fira Code" panose="020B0809050000020004" pitchFamily="49" charset="0"/>
+              </a:rPr>
+              <a:t>return</a:t>
+            </a:r>
+            <a:r>
+              <a:rPr lang="en-US" sz="1000" dirty="0">
+                <a:solidFill>
+                  <a:schemeClr val="tx2"/>
+                </a:solidFill>
+                <a:latin typeface="Fira Code" panose="020B0809050000020004" pitchFamily="49" charset="0"/>
+                <a:ea typeface="Fira Code" panose="020B0809050000020004" pitchFamily="49" charset="0"/>
+                <a:cs typeface="Fira Code" panose="020B0809050000020004" pitchFamily="49" charset="0"/>
+              </a:rPr>
+              <a:t> </a:t>
+            </a:r>
+            <a:r>
+              <a:rPr lang="en-US" sz="1100" dirty="0">
+                <a:solidFill>
+                  <a:schemeClr val="accent1">
+                    <a:lumMod val="75000"/>
+                  </a:schemeClr>
+                </a:solidFill>
+                <a:latin typeface="Fira Code" panose="020B0809050000020004" pitchFamily="49" charset="0"/>
+                <a:ea typeface="Fira Code" panose="020B0809050000020004" pitchFamily="49" charset="0"/>
+                <a:cs typeface="Fira Code" panose="020B0809050000020004" pitchFamily="49" charset="0"/>
+              </a:rPr>
+              <a:t>0;</a:t>
+            </a:r>
+          </a:p>
+          <a:p>
+            <a:r>
+              <a:rPr lang="en-US" sz="1000" dirty="0">
+                <a:solidFill>
+                  <a:schemeClr val="tx2"/>
+                </a:solidFill>
+                <a:latin typeface="Fira Code" panose="020B0809050000020004" pitchFamily="49" charset="0"/>
+                <a:ea typeface="Fira Code" panose="020B0809050000020004" pitchFamily="49" charset="0"/>
+                <a:cs typeface="Fira Code" panose="020B0809050000020004" pitchFamily="49" charset="0"/>
+              </a:rPr>
+              <a:t>}</a:t>
+            </a:r>
+          </a:p>
+        </p:txBody>
+      </p:sp>
     </p:spTree>
     <p:extLst>
       <p:ext uri="{BB962C8B-B14F-4D97-AF65-F5344CB8AC3E}">
-        <p14:creationId xmlns:p14="http://schemas.microsoft.com/office/powerpoint/2010/main" val="3112381000"/>
+        <p14:creationId xmlns:p14="http://schemas.microsoft.com/office/powerpoint/2010/main" val="1740485649"/>
       </p:ext>
     </p:extLst>
   </p:cSld>
@@ -21070,36 +21655,6 @@
           </a:p>
         </p:txBody>
       </p:sp>
-      <p:pic>
-        <p:nvPicPr>
-          <p:cNvPr id="8" name="Picture 7">
-            <a:extLst>
-              <a:ext uri="{FF2B5EF4-FFF2-40B4-BE49-F238E27FC236}">
-                <a16:creationId xmlns:a16="http://schemas.microsoft.com/office/drawing/2014/main" id="{36F698AA-7D7A-72AA-5F35-5ED4731C9B72}"/>
-              </a:ext>
-            </a:extLst>
-          </p:cNvPr>
-          <p:cNvPicPr>
-            <a:picLocks noChangeAspect="1"/>
-          </p:cNvPicPr>
-          <p:nvPr/>
-        </p:nvPicPr>
-        <p:blipFill>
-          <a:blip r:embed="rId4"/>
-          <a:stretch>
-            <a:fillRect/>
-          </a:stretch>
-        </p:blipFill>
-        <p:spPr>
-          <a:xfrm>
-            <a:off x="5789662" y="904273"/>
-            <a:ext cx="2963313" cy="1515077"/>
-          </a:xfrm>
-          <a:prstGeom prst="rect">
-            <a:avLst/>
-          </a:prstGeom>
-        </p:spPr>
-      </p:pic>
       <p:sp>
         <p:nvSpPr>
           <p:cNvPr id="9" name="Google Shape;465;p27">
@@ -21383,6 +21938,216 @@
             <a:r>
               <a:rPr lang="en-US" sz="1000" dirty="0"/>
               <a:t>Task 3</a:t>
+            </a:r>
+          </a:p>
+        </p:txBody>
+      </p:sp>
+      <p:sp>
+        <p:nvSpPr>
+          <p:cNvPr id="2" name="Rectangle: Rounded Corners 1">
+            <a:extLst>
+              <a:ext uri="{FF2B5EF4-FFF2-40B4-BE49-F238E27FC236}">
+                <a16:creationId xmlns:a16="http://schemas.microsoft.com/office/drawing/2014/main" id="{971D6470-93C3-8FF4-34A4-D6B91E413195}"/>
+              </a:ext>
+            </a:extLst>
+          </p:cNvPr>
+          <p:cNvSpPr/>
+          <p:nvPr/>
+        </p:nvSpPr>
+        <p:spPr>
+          <a:xfrm>
+            <a:off x="5434823" y="937881"/>
+            <a:ext cx="3504175" cy="1637193"/>
+          </a:xfrm>
+          <a:prstGeom prst="roundRect">
+            <a:avLst>
+              <a:gd name="adj" fmla="val 5419"/>
+            </a:avLst>
+          </a:prstGeom>
+          <a:solidFill>
+            <a:schemeClr val="accent5"/>
+          </a:solidFill>
+          <a:ln>
+            <a:noFill/>
+          </a:ln>
+        </p:spPr>
+        <p:style>
+          <a:lnRef idx="0">
+            <a:scrgbClr r="0" g="0" b="0"/>
+          </a:lnRef>
+          <a:fillRef idx="0">
+            <a:scrgbClr r="0" g="0" b="0"/>
+          </a:fillRef>
+          <a:effectRef idx="0">
+            <a:scrgbClr r="0" g="0" b="0"/>
+          </a:effectRef>
+          <a:fontRef idx="minor">
+            <a:schemeClr val="lt1"/>
+          </a:fontRef>
+        </p:style>
+        <p:txBody>
+          <a:bodyPr rtlCol="0" anchor="ctr"/>
+          <a:lstStyle/>
+          <a:p>
+            <a:r>
+              <a:rPr lang="en-US" sz="1100" dirty="0">
+                <a:solidFill>
+                  <a:schemeClr val="accent6"/>
+                </a:solidFill>
+                <a:latin typeface="Fira Code" panose="020B0809050000020004" pitchFamily="49" charset="0"/>
+                <a:ea typeface="Fira Code" panose="020B0809050000020004" pitchFamily="49" charset="0"/>
+                <a:cs typeface="Fira Code" panose="020B0809050000020004" pitchFamily="49" charset="0"/>
+              </a:rPr>
+              <a:t>#include &lt;</a:t>
+            </a:r>
+            <a:r>
+              <a:rPr lang="en-US" sz="1100" dirty="0" err="1">
+                <a:solidFill>
+                  <a:schemeClr val="accent6"/>
+                </a:solidFill>
+                <a:latin typeface="Fira Code" panose="020B0809050000020004" pitchFamily="49" charset="0"/>
+                <a:ea typeface="Fira Code" panose="020B0809050000020004" pitchFamily="49" charset="0"/>
+                <a:cs typeface="Fira Code" panose="020B0809050000020004" pitchFamily="49" charset="0"/>
+              </a:rPr>
+              <a:t>stdio.h</a:t>
+            </a:r>
+            <a:r>
+              <a:rPr lang="en-US" sz="1100" dirty="0">
+                <a:solidFill>
+                  <a:schemeClr val="accent6"/>
+                </a:solidFill>
+                <a:latin typeface="Fira Code" panose="020B0809050000020004" pitchFamily="49" charset="0"/>
+                <a:ea typeface="Fira Code" panose="020B0809050000020004" pitchFamily="49" charset="0"/>
+                <a:cs typeface="Fira Code" panose="020B0809050000020004" pitchFamily="49" charset="0"/>
+              </a:rPr>
+              <a:t>&gt;</a:t>
+            </a:r>
+          </a:p>
+          <a:p>
+            <a:endParaRPr lang="en-US" sz="1100" dirty="0">
+              <a:solidFill>
+                <a:schemeClr val="tx2"/>
+              </a:solidFill>
+              <a:latin typeface="Fira Code" panose="020B0809050000020004" pitchFamily="49" charset="0"/>
+              <a:ea typeface="Fira Code" panose="020B0809050000020004" pitchFamily="49" charset="0"/>
+              <a:cs typeface="Fira Code" panose="020B0809050000020004" pitchFamily="49" charset="0"/>
+            </a:endParaRPr>
+          </a:p>
+          <a:p>
+            <a:r>
+              <a:rPr lang="en-US" sz="1100" dirty="0">
+                <a:solidFill>
+                  <a:schemeClr val="tx2"/>
+                </a:solidFill>
+                <a:latin typeface="Fira Code" panose="020B0809050000020004" pitchFamily="49" charset="0"/>
+                <a:ea typeface="Fira Code" panose="020B0809050000020004" pitchFamily="49" charset="0"/>
+                <a:cs typeface="Fira Code" panose="020B0809050000020004" pitchFamily="49" charset="0"/>
+              </a:rPr>
+              <a:t>int main()</a:t>
+            </a:r>
+          </a:p>
+          <a:p>
+            <a:r>
+              <a:rPr lang="en-US" sz="1100" dirty="0">
+                <a:solidFill>
+                  <a:schemeClr val="tx2"/>
+                </a:solidFill>
+                <a:latin typeface="Fira Code" panose="020B0809050000020004" pitchFamily="49" charset="0"/>
+                <a:ea typeface="Fira Code" panose="020B0809050000020004" pitchFamily="49" charset="0"/>
+                <a:cs typeface="Fira Code" panose="020B0809050000020004" pitchFamily="49" charset="0"/>
+              </a:rPr>
+              <a:t>{</a:t>
+            </a:r>
+          </a:p>
+          <a:p>
+            <a:r>
+              <a:rPr lang="en-US" sz="1100" dirty="0">
+                <a:solidFill>
+                  <a:schemeClr val="tx2"/>
+                </a:solidFill>
+                <a:latin typeface="Fira Code" panose="020B0809050000020004" pitchFamily="49" charset="0"/>
+                <a:ea typeface="Fira Code" panose="020B0809050000020004" pitchFamily="49" charset="0"/>
+                <a:cs typeface="Fira Code" panose="020B0809050000020004" pitchFamily="49" charset="0"/>
+              </a:rPr>
+              <a:t>    int </a:t>
+            </a:r>
+            <a:r>
+              <a:rPr lang="en-US" sz="1100" dirty="0">
+                <a:solidFill>
+                  <a:schemeClr val="accent1">
+                    <a:lumMod val="75000"/>
+                  </a:schemeClr>
+                </a:solidFill>
+                <a:latin typeface="Fira Code" panose="020B0809050000020004" pitchFamily="49" charset="0"/>
+                <a:ea typeface="Fira Code" panose="020B0809050000020004" pitchFamily="49" charset="0"/>
+                <a:cs typeface="Fira Code" panose="020B0809050000020004" pitchFamily="49" charset="0"/>
+              </a:rPr>
+              <a:t>var1 = 10;</a:t>
+            </a:r>
+          </a:p>
+          <a:p>
+            <a:r>
+              <a:rPr lang="en-US" sz="1100" dirty="0">
+                <a:solidFill>
+                  <a:schemeClr val="tx2"/>
+                </a:solidFill>
+                <a:latin typeface="Fira Code" panose="020B0809050000020004" pitchFamily="49" charset="0"/>
+                <a:ea typeface="Fira Code" panose="020B0809050000020004" pitchFamily="49" charset="0"/>
+                <a:cs typeface="Fira Code" panose="020B0809050000020004" pitchFamily="49" charset="0"/>
+              </a:rPr>
+              <a:t>    int </a:t>
+            </a:r>
+            <a:r>
+              <a:rPr lang="en-US" sz="1100" dirty="0">
+                <a:solidFill>
+                  <a:schemeClr val="accent1">
+                    <a:lumMod val="75000"/>
+                  </a:schemeClr>
+                </a:solidFill>
+                <a:latin typeface="Fira Code" panose="020B0809050000020004" pitchFamily="49" charset="0"/>
+                <a:ea typeface="Fira Code" panose="020B0809050000020004" pitchFamily="49" charset="0"/>
+                <a:cs typeface="Fira Code" panose="020B0809050000020004" pitchFamily="49" charset="0"/>
+              </a:rPr>
+              <a:t>var2 = 20;</a:t>
+            </a:r>
+          </a:p>
+          <a:p>
+            <a:r>
+              <a:rPr lang="en-US" sz="1100" dirty="0">
+                <a:solidFill>
+                  <a:schemeClr val="tx2"/>
+                </a:solidFill>
+                <a:latin typeface="Fira Code" panose="020B0809050000020004" pitchFamily="49" charset="0"/>
+                <a:ea typeface="Fira Code" panose="020B0809050000020004" pitchFamily="49" charset="0"/>
+                <a:cs typeface="Fira Code" panose="020B0809050000020004" pitchFamily="49" charset="0"/>
+              </a:rPr>
+              <a:t>    int </a:t>
+            </a:r>
+            <a:r>
+              <a:rPr lang="en-US" sz="1100" dirty="0">
+                <a:solidFill>
+                  <a:schemeClr val="accent1">
+                    <a:lumMod val="75000"/>
+                  </a:schemeClr>
+                </a:solidFill>
+                <a:latin typeface="Fira Code" panose="020B0809050000020004" pitchFamily="49" charset="0"/>
+                <a:ea typeface="Fira Code" panose="020B0809050000020004" pitchFamily="49" charset="0"/>
+                <a:cs typeface="Fira Code" panose="020B0809050000020004" pitchFamily="49" charset="0"/>
+              </a:rPr>
+              <a:t>var3 = 30;</a:t>
+            </a:r>
+          </a:p>
+          <a:p>
+            <a:r>
+              <a:rPr lang="en-US" sz="1100" dirty="0">
+                <a:solidFill>
+                  <a:schemeClr val="tx2"/>
+                </a:solidFill>
+                <a:latin typeface="Fira Code" panose="020B0809050000020004" pitchFamily="49" charset="0"/>
+                <a:ea typeface="Fira Code" panose="020B0809050000020004" pitchFamily="49" charset="0"/>
+                <a:cs typeface="Fira Code" panose="020B0809050000020004" pitchFamily="49" charset="0"/>
+              </a:rPr>
+              <a:t>}</a:t>
             </a:r>
           </a:p>
         </p:txBody>
@@ -22885,36 +23650,257 @@
           </a:p>
         </p:txBody>
       </p:sp>
-      <p:pic>
-        <p:nvPicPr>
-          <p:cNvPr id="8" name="Picture 7">
+      <p:sp>
+        <p:nvSpPr>
+          <p:cNvPr id="9" name="Rectangle: Rounded Corners 8">
             <a:extLst>
               <a:ext uri="{FF2B5EF4-FFF2-40B4-BE49-F238E27FC236}">
-                <a16:creationId xmlns:a16="http://schemas.microsoft.com/office/drawing/2014/main" id="{FD7090FB-6ECD-B8AD-53DA-31D1459F6996}"/>
+                <a16:creationId xmlns:a16="http://schemas.microsoft.com/office/drawing/2014/main" id="{2B0CE6FC-A8AB-D9D9-47F3-D0C896F0DB57}"/>
               </a:ext>
             </a:extLst>
           </p:cNvPr>
-          <p:cNvPicPr>
-            <a:picLocks noChangeAspect="1"/>
-          </p:cNvPicPr>
+          <p:cNvSpPr/>
           <p:nvPr/>
-        </p:nvPicPr>
-        <p:blipFill>
-          <a:blip r:embed="rId3"/>
-          <a:stretch>
-            <a:fillRect/>
-          </a:stretch>
-        </p:blipFill>
+        </p:nvSpPr>
         <p:spPr>
           <a:xfrm>
-            <a:off x="4597625" y="1800995"/>
-            <a:ext cx="4274843" cy="2275816"/>
+            <a:off x="5272705" y="1626901"/>
+            <a:ext cx="3639337" cy="1707621"/>
           </a:xfrm>
-          <a:prstGeom prst="rect">
-            <a:avLst/>
+          <a:prstGeom prst="roundRect">
+            <a:avLst>
+              <a:gd name="adj" fmla="val 5419"/>
+            </a:avLst>
           </a:prstGeom>
+          <a:solidFill>
+            <a:schemeClr val="accent5"/>
+          </a:solidFill>
+          <a:ln>
+            <a:noFill/>
+          </a:ln>
         </p:spPr>
-      </p:pic>
+        <p:style>
+          <a:lnRef idx="0">
+            <a:scrgbClr r="0" g="0" b="0"/>
+          </a:lnRef>
+          <a:fillRef idx="0">
+            <a:scrgbClr r="0" g="0" b="0"/>
+          </a:fillRef>
+          <a:effectRef idx="0">
+            <a:scrgbClr r="0" g="0" b="0"/>
+          </a:effectRef>
+          <a:fontRef idx="minor">
+            <a:schemeClr val="lt1"/>
+          </a:fontRef>
+        </p:style>
+        <p:txBody>
+          <a:bodyPr rtlCol="0" anchor="ctr"/>
+          <a:lstStyle/>
+          <a:p>
+            <a:r>
+              <a:rPr lang="en-US" sz="700" dirty="0">
+                <a:solidFill>
+                  <a:schemeClr val="tx2"/>
+                </a:solidFill>
+                <a:latin typeface="Fira Code" panose="020B0809050000020004" pitchFamily="49" charset="0"/>
+                <a:ea typeface="Fira Code" panose="020B0809050000020004" pitchFamily="49" charset="0"/>
+                <a:cs typeface="Fira Code" panose="020B0809050000020004" pitchFamily="49" charset="0"/>
+              </a:rPr>
+              <a:t>void fun(char **);</a:t>
+            </a:r>
+          </a:p>
+          <a:p>
+            <a:r>
+              <a:rPr lang="en-US" sz="700" dirty="0">
+                <a:solidFill>
+                  <a:schemeClr val="tx2"/>
+                </a:solidFill>
+                <a:latin typeface="Fira Code" panose="020B0809050000020004" pitchFamily="49" charset="0"/>
+                <a:ea typeface="Fira Code" panose="020B0809050000020004" pitchFamily="49" charset="0"/>
+                <a:cs typeface="Fira Code" panose="020B0809050000020004" pitchFamily="49" charset="0"/>
+              </a:rPr>
+              <a:t>int main() {</a:t>
+            </a:r>
+          </a:p>
+          <a:p>
+            <a:r>
+              <a:rPr lang="en-US" sz="700" dirty="0">
+                <a:solidFill>
+                  <a:schemeClr val="tx2"/>
+                </a:solidFill>
+                <a:latin typeface="Fira Code" panose="020B0809050000020004" pitchFamily="49" charset="0"/>
+                <a:ea typeface="Fira Code" panose="020B0809050000020004" pitchFamily="49" charset="0"/>
+                <a:cs typeface="Fira Code" panose="020B0809050000020004" pitchFamily="49" charset="0"/>
+              </a:rPr>
+              <a:t>    char *list[] = </a:t>
+            </a:r>
+            <a:r>
+              <a:rPr lang="en-US" sz="700" dirty="0">
+                <a:solidFill>
+                  <a:schemeClr val="accent1">
+                    <a:lumMod val="75000"/>
+                  </a:schemeClr>
+                </a:solidFill>
+                <a:latin typeface="Fira Code" panose="020B0809050000020004" pitchFamily="49" charset="0"/>
+                <a:ea typeface="Fira Code" panose="020B0809050000020004" pitchFamily="49" charset="0"/>
+                <a:cs typeface="Fira Code" panose="020B0809050000020004" pitchFamily="49" charset="0"/>
+              </a:rPr>
+              <a:t>{"one", "two", "three", "four", "five"};</a:t>
+            </a:r>
+          </a:p>
+          <a:p>
+            <a:r>
+              <a:rPr lang="en-US" sz="700" dirty="0">
+                <a:solidFill>
+                  <a:schemeClr val="tx2"/>
+                </a:solidFill>
+                <a:latin typeface="Fira Code" panose="020B0809050000020004" pitchFamily="49" charset="0"/>
+                <a:ea typeface="Fira Code" panose="020B0809050000020004" pitchFamily="49" charset="0"/>
+                <a:cs typeface="Fira Code" panose="020B0809050000020004" pitchFamily="49" charset="0"/>
+              </a:rPr>
+              <a:t>    fun(list);</a:t>
+            </a:r>
+          </a:p>
+          <a:p>
+            <a:r>
+              <a:rPr lang="en-US" sz="700" dirty="0">
+                <a:solidFill>
+                  <a:schemeClr val="tx2"/>
+                </a:solidFill>
+                <a:latin typeface="Fira Code" panose="020B0809050000020004" pitchFamily="49" charset="0"/>
+                <a:ea typeface="Fira Code" panose="020B0809050000020004" pitchFamily="49" charset="0"/>
+                <a:cs typeface="Fira Code" panose="020B0809050000020004" pitchFamily="49" charset="0"/>
+              </a:rPr>
+              <a:t>    return 0;</a:t>
+            </a:r>
+          </a:p>
+          <a:p>
+            <a:r>
+              <a:rPr lang="en-US" sz="700" dirty="0">
+                <a:solidFill>
+                  <a:schemeClr val="tx2"/>
+                </a:solidFill>
+                <a:latin typeface="Fira Code" panose="020B0809050000020004" pitchFamily="49" charset="0"/>
+                <a:ea typeface="Fira Code" panose="020B0809050000020004" pitchFamily="49" charset="0"/>
+                <a:cs typeface="Fira Code" panose="020B0809050000020004" pitchFamily="49" charset="0"/>
+              </a:rPr>
+              <a:t>}</a:t>
+            </a:r>
+          </a:p>
+          <a:p>
+            <a:endParaRPr lang="en-US" sz="700" dirty="0">
+              <a:solidFill>
+                <a:schemeClr val="tx2"/>
+              </a:solidFill>
+              <a:latin typeface="Fira Code" panose="020B0809050000020004" pitchFamily="49" charset="0"/>
+              <a:ea typeface="Fira Code" panose="020B0809050000020004" pitchFamily="49" charset="0"/>
+              <a:cs typeface="Fira Code" panose="020B0809050000020004" pitchFamily="49" charset="0"/>
+            </a:endParaRPr>
+          </a:p>
+          <a:p>
+            <a:r>
+              <a:rPr lang="en-US" sz="700" dirty="0">
+                <a:solidFill>
+                  <a:schemeClr val="tx2"/>
+                </a:solidFill>
+                <a:latin typeface="Fira Code" panose="020B0809050000020004" pitchFamily="49" charset="0"/>
+                <a:ea typeface="Fira Code" panose="020B0809050000020004" pitchFamily="49" charset="0"/>
+                <a:cs typeface="Fira Code" panose="020B0809050000020004" pitchFamily="49" charset="0"/>
+              </a:rPr>
+              <a:t>void fun(char **p) {</a:t>
+            </a:r>
+          </a:p>
+          <a:p>
+            <a:r>
+              <a:rPr lang="en-US" sz="700" dirty="0">
+                <a:solidFill>
+                  <a:schemeClr val="tx2"/>
+                </a:solidFill>
+                <a:latin typeface="Fira Code" panose="020B0809050000020004" pitchFamily="49" charset="0"/>
+                <a:ea typeface="Fira Code" panose="020B0809050000020004" pitchFamily="49" charset="0"/>
+                <a:cs typeface="Fira Code" panose="020B0809050000020004" pitchFamily="49" charset="0"/>
+              </a:rPr>
+              <a:t>    char *s;</a:t>
+            </a:r>
+          </a:p>
+          <a:p>
+            <a:r>
+              <a:rPr lang="en-US" sz="700" dirty="0">
+                <a:solidFill>
+                  <a:schemeClr val="tx2"/>
+                </a:solidFill>
+                <a:latin typeface="Fira Code" panose="020B0809050000020004" pitchFamily="49" charset="0"/>
+                <a:ea typeface="Fira Code" panose="020B0809050000020004" pitchFamily="49" charset="0"/>
+                <a:cs typeface="Fira Code" panose="020B0809050000020004" pitchFamily="49" charset="0"/>
+              </a:rPr>
+              <a:t>    s = </a:t>
+            </a:r>
+            <a:r>
+              <a:rPr lang="en-US" sz="700" dirty="0">
+                <a:solidFill>
+                  <a:schemeClr val="accent1">
+                    <a:lumMod val="75000"/>
+                  </a:schemeClr>
+                </a:solidFill>
+                <a:latin typeface="Fira Code" panose="020B0809050000020004" pitchFamily="49" charset="0"/>
+                <a:ea typeface="Fira Code" panose="020B0809050000020004" pitchFamily="49" charset="0"/>
+                <a:cs typeface="Fira Code" panose="020B0809050000020004" pitchFamily="49" charset="0"/>
+              </a:rPr>
+              <a:t>(p += 3)[-2];</a:t>
+            </a:r>
+          </a:p>
+          <a:p>
+            <a:r>
+              <a:rPr lang="en-US" sz="700" dirty="0">
+                <a:solidFill>
+                  <a:schemeClr val="tx2"/>
+                </a:solidFill>
+                <a:latin typeface="Fira Code" panose="020B0809050000020004" pitchFamily="49" charset="0"/>
+                <a:ea typeface="Fira Code" panose="020B0809050000020004" pitchFamily="49" charset="0"/>
+                <a:cs typeface="Fira Code" panose="020B0809050000020004" pitchFamily="49" charset="0"/>
+              </a:rPr>
+              <a:t>    </a:t>
+            </a:r>
+            <a:r>
+              <a:rPr lang="en-US" sz="700" dirty="0" err="1">
+                <a:solidFill>
+                  <a:schemeClr val="tx2"/>
+                </a:solidFill>
+                <a:latin typeface="Fira Code" panose="020B0809050000020004" pitchFamily="49" charset="0"/>
+                <a:ea typeface="Fira Code" panose="020B0809050000020004" pitchFamily="49" charset="0"/>
+                <a:cs typeface="Fira Code" panose="020B0809050000020004" pitchFamily="49" charset="0"/>
+              </a:rPr>
+              <a:t>printf</a:t>
+            </a:r>
+            <a:r>
+              <a:rPr lang="en-US" sz="700" dirty="0">
+                <a:solidFill>
+                  <a:schemeClr val="accent1">
+                    <a:lumMod val="75000"/>
+                  </a:schemeClr>
+                </a:solidFill>
+                <a:latin typeface="Fira Code" panose="020B0809050000020004" pitchFamily="49" charset="0"/>
+                <a:ea typeface="Fira Code" panose="020B0809050000020004" pitchFamily="49" charset="0"/>
+                <a:cs typeface="Fira Code" panose="020B0809050000020004" pitchFamily="49" charset="0"/>
+              </a:rPr>
+              <a:t>("%s\n", s);</a:t>
+            </a:r>
+          </a:p>
+          <a:p>
+            <a:r>
+              <a:rPr lang="en-US" sz="700" dirty="0">
+                <a:solidFill>
+                  <a:schemeClr val="tx2"/>
+                </a:solidFill>
+                <a:latin typeface="Fira Code" panose="020B0809050000020004" pitchFamily="49" charset="0"/>
+                <a:ea typeface="Fira Code" panose="020B0809050000020004" pitchFamily="49" charset="0"/>
+                <a:cs typeface="Fira Code" panose="020B0809050000020004" pitchFamily="49" charset="0"/>
+              </a:rPr>
+              <a:t>}</a:t>
+            </a:r>
+          </a:p>
+        </p:txBody>
+      </p:sp>
     </p:spTree>
     <p:extLst>
       <p:ext uri="{BB962C8B-B14F-4D97-AF65-F5344CB8AC3E}">

--- a/slides/8.Pointer_1/Pointer_1.pptx
+++ b/slides/8.Pointer_1/Pointer_1.pptx
@@ -11978,20 +11978,12 @@
               <a:buNone/>
             </a:pPr>
             <a:r>
-              <a:rPr lang="en" sz="1100" dirty="0">
+              <a:rPr lang="en-US" sz="1100" dirty="0">
                 <a:solidFill>
                   <a:schemeClr val="accent3"/>
                 </a:solidFill>
               </a:rPr>
-              <a:t>1</a:t>
-            </a:r>
-            <a:r>
-              <a:rPr lang="fa-IR" sz="1100" dirty="0">
-                <a:solidFill>
-                  <a:schemeClr val="accent3"/>
-                </a:solidFill>
-              </a:rPr>
-              <a:t>3</a:t>
+              <a:t>8</a:t>
             </a:r>
             <a:endParaRPr lang="en" dirty="0">
               <a:solidFill>
@@ -13298,53 +13290,6 @@
           </a:p>
         </p:txBody>
       </p:sp>
-      <p:pic>
-        <p:nvPicPr>
-          <p:cNvPr id="1030" name="Picture 6" descr="6.4. Main Memory — CS160 Reader">
-            <a:extLst>
-              <a:ext uri="{FF2B5EF4-FFF2-40B4-BE49-F238E27FC236}">
-                <a16:creationId xmlns:a16="http://schemas.microsoft.com/office/drawing/2014/main" id="{BF38675C-9279-9267-B0ED-E1A4B6749376}"/>
-              </a:ext>
-            </a:extLst>
-          </p:cNvPr>
-          <p:cNvPicPr>
-            <a:picLocks noChangeAspect="1" noChangeArrowheads="1"/>
-          </p:cNvPicPr>
-          <p:nvPr/>
-        </p:nvPicPr>
-        <p:blipFill>
-          <a:blip r:embed="rId3">
-            <a:extLst>
-              <a:ext uri="{28A0092B-C50C-407E-A947-70E740481C1C}">
-                <a14:useLocalDpi xmlns:a14="http://schemas.microsoft.com/office/drawing/2010/main" val="0"/>
-              </a:ext>
-            </a:extLst>
-          </a:blip>
-          <a:srcRect/>
-          <a:stretch>
-            <a:fillRect/>
-          </a:stretch>
-        </p:blipFill>
-        <p:spPr bwMode="auto">
-          <a:xfrm>
-            <a:off x="6892975" y="1227663"/>
-            <a:ext cx="1860000" cy="2593625"/>
-          </a:xfrm>
-          <a:prstGeom prst="rect">
-            <a:avLst/>
-          </a:prstGeom>
-          <a:noFill/>
-          <a:extLst>
-            <a:ext uri="{909E8E84-426E-40DD-AFC4-6F175D3DCCD1}">
-              <a14:hiddenFill xmlns:a14="http://schemas.microsoft.com/office/drawing/2010/main">
-                <a:solidFill>
-                  <a:srgbClr val="FFFFFF"/>
-                </a:solidFill>
-              </a14:hiddenFill>
-            </a:ext>
-          </a:extLst>
-        </p:spPr>
-      </p:pic>
       <p:sp>
         <p:nvSpPr>
           <p:cNvPr id="5" name="TextBox 4">
@@ -13667,6 +13612,400 @@
           </a:p>
         </p:txBody>
       </p:sp>
+      <p:graphicFrame>
+        <p:nvGraphicFramePr>
+          <p:cNvPr id="2" name="Table 1">
+            <a:extLst>
+              <a:ext uri="{FF2B5EF4-FFF2-40B4-BE49-F238E27FC236}">
+                <a16:creationId xmlns:a16="http://schemas.microsoft.com/office/drawing/2014/main" id="{750BADE7-D3CE-C851-AB17-E4ABCEF6D799}"/>
+              </a:ext>
+            </a:extLst>
+          </p:cNvPr>
+          <p:cNvGraphicFramePr>
+            <a:graphicFrameLocks noGrp="1"/>
+          </p:cNvGraphicFramePr>
+          <p:nvPr>
+            <p:extLst>
+              <p:ext uri="{D42A27DB-BD31-4B8C-83A1-F6EECF244321}">
+                <p14:modId xmlns:p14="http://schemas.microsoft.com/office/powerpoint/2010/main" val="4138139852"/>
+              </p:ext>
+            </p:extLst>
+          </p:nvPr>
+        </p:nvGraphicFramePr>
+        <p:xfrm>
+          <a:off x="6883684" y="1081216"/>
+          <a:ext cx="2023422" cy="2913368"/>
+        </p:xfrm>
+        <a:graphic>
+          <a:graphicData uri="http://schemas.openxmlformats.org/drawingml/2006/table">
+            <a:tbl>
+              <a:tblPr firstRow="1" bandRow="1">
+                <a:tableStyleId>{4BEAB1D1-4E42-4361-B4FD-13862715D387}</a:tableStyleId>
+              </a:tblPr>
+              <a:tblGrid>
+                <a:gridCol w="1011711">
+                  <a:extLst>
+                    <a:ext uri="{9D8B030D-6E8A-4147-A177-3AD203B41FA5}">
+                      <a16:colId xmlns:a16="http://schemas.microsoft.com/office/drawing/2014/main" val="3741217629"/>
+                    </a:ext>
+                  </a:extLst>
+                </a:gridCol>
+                <a:gridCol w="1011711">
+                  <a:extLst>
+                    <a:ext uri="{9D8B030D-6E8A-4147-A177-3AD203B41FA5}">
+                      <a16:colId xmlns:a16="http://schemas.microsoft.com/office/drawing/2014/main" val="3591646568"/>
+                    </a:ext>
+                  </a:extLst>
+                </a:gridCol>
+              </a:tblGrid>
+              <a:tr h="364171">
+                <a:tc>
+                  <a:txBody>
+                    <a:bodyPr/>
+                    <a:lstStyle/>
+                    <a:p>
+                      <a:pPr algn="ctr"/>
+                      <a:r>
+                        <a:rPr lang="en-US" sz="1100" dirty="0">
+                          <a:solidFill>
+                            <a:schemeClr val="accent6"/>
+                          </a:solidFill>
+                        </a:rPr>
+                        <a:t>address</a:t>
+                      </a:r>
+                    </a:p>
+                  </a:txBody>
+                  <a:tcPr/>
+                </a:tc>
+                <a:tc>
+                  <a:txBody>
+                    <a:bodyPr/>
+                    <a:lstStyle/>
+                    <a:p>
+                      <a:pPr algn="ctr"/>
+                      <a:r>
+                        <a:rPr lang="en-US" sz="1100" dirty="0">
+                          <a:solidFill>
+                            <a:schemeClr val="accent6"/>
+                          </a:solidFill>
+                        </a:rPr>
+                        <a:t>value</a:t>
+                      </a:r>
+                    </a:p>
+                  </a:txBody>
+                  <a:tcPr/>
+                </a:tc>
+                <a:extLst>
+                  <a:ext uri="{0D108BD9-81ED-4DB2-BD59-A6C34878D82A}">
+                    <a16:rowId xmlns:a16="http://schemas.microsoft.com/office/drawing/2014/main" val="4294845689"/>
+                  </a:ext>
+                </a:extLst>
+              </a:tr>
+              <a:tr h="364171">
+                <a:tc>
+                  <a:txBody>
+                    <a:bodyPr/>
+                    <a:lstStyle/>
+                    <a:p>
+                      <a:pPr algn="ctr"/>
+                      <a:r>
+                        <a:rPr lang="en-US" sz="1100" dirty="0">
+                          <a:solidFill>
+                            <a:schemeClr val="accent6"/>
+                          </a:solidFill>
+                        </a:rPr>
+                        <a:t>0x00</a:t>
+                      </a:r>
+                    </a:p>
+                  </a:txBody>
+                  <a:tcPr/>
+                </a:tc>
+                <a:tc>
+                  <a:txBody>
+                    <a:bodyPr/>
+                    <a:lstStyle/>
+                    <a:p>
+                      <a:pPr algn="ctr"/>
+                      <a:r>
+                        <a:rPr lang="en-US" sz="1100" dirty="0">
+                          <a:solidFill>
+                            <a:schemeClr val="accent6"/>
+                          </a:solidFill>
+                        </a:rPr>
+                        <a:t>01001010</a:t>
+                      </a:r>
+                    </a:p>
+                  </a:txBody>
+                  <a:tcPr/>
+                </a:tc>
+                <a:extLst>
+                  <a:ext uri="{0D108BD9-81ED-4DB2-BD59-A6C34878D82A}">
+                    <a16:rowId xmlns:a16="http://schemas.microsoft.com/office/drawing/2014/main" val="2747791831"/>
+                  </a:ext>
+                </a:extLst>
+              </a:tr>
+              <a:tr h="364171">
+                <a:tc>
+                  <a:txBody>
+                    <a:bodyPr/>
+                    <a:lstStyle/>
+                    <a:p>
+                      <a:pPr algn="ctr"/>
+                      <a:r>
+                        <a:rPr lang="en-US" sz="1100" dirty="0">
+                          <a:solidFill>
+                            <a:schemeClr val="accent6"/>
+                          </a:solidFill>
+                        </a:rPr>
+                        <a:t>0x01</a:t>
+                      </a:r>
+                    </a:p>
+                  </a:txBody>
+                  <a:tcPr/>
+                </a:tc>
+                <a:tc>
+                  <a:txBody>
+                    <a:bodyPr/>
+                    <a:lstStyle/>
+                    <a:p>
+                      <a:pPr algn="ctr"/>
+                      <a:r>
+                        <a:rPr lang="en-US" sz="1100" dirty="0">
+                          <a:solidFill>
+                            <a:schemeClr val="accent6"/>
+                          </a:solidFill>
+                        </a:rPr>
+                        <a:t>10001000</a:t>
+                      </a:r>
+                    </a:p>
+                  </a:txBody>
+                  <a:tcPr/>
+                </a:tc>
+                <a:extLst>
+                  <a:ext uri="{0D108BD9-81ED-4DB2-BD59-A6C34878D82A}">
+                    <a16:rowId xmlns:a16="http://schemas.microsoft.com/office/drawing/2014/main" val="2567162775"/>
+                  </a:ext>
+                </a:extLst>
+              </a:tr>
+              <a:tr h="364171">
+                <a:tc>
+                  <a:txBody>
+                    <a:bodyPr/>
+                    <a:lstStyle/>
+                    <a:p>
+                      <a:pPr algn="ctr"/>
+                      <a:r>
+                        <a:rPr lang="en-US" sz="1100" dirty="0">
+                          <a:solidFill>
+                            <a:schemeClr val="accent6"/>
+                          </a:solidFill>
+                        </a:rPr>
+                        <a:t>0x02</a:t>
+                      </a:r>
+                    </a:p>
+                  </a:txBody>
+                  <a:tcPr/>
+                </a:tc>
+                <a:tc>
+                  <a:txBody>
+                    <a:bodyPr/>
+                    <a:lstStyle/>
+                    <a:p>
+                      <a:pPr algn="ctr"/>
+                      <a:r>
+                        <a:rPr lang="en-US" sz="1100" dirty="0">
+                          <a:solidFill>
+                            <a:schemeClr val="accent6"/>
+                          </a:solidFill>
+                        </a:rPr>
+                        <a:t>00101110</a:t>
+                      </a:r>
+                    </a:p>
+                  </a:txBody>
+                  <a:tcPr/>
+                </a:tc>
+                <a:extLst>
+                  <a:ext uri="{0D108BD9-81ED-4DB2-BD59-A6C34878D82A}">
+                    <a16:rowId xmlns:a16="http://schemas.microsoft.com/office/drawing/2014/main" val="2515839577"/>
+                  </a:ext>
+                </a:extLst>
+              </a:tr>
+              <a:tr h="364171">
+                <a:tc>
+                  <a:txBody>
+                    <a:bodyPr/>
+                    <a:lstStyle/>
+                    <a:p>
+                      <a:pPr algn="ctr"/>
+                      <a:r>
+                        <a:rPr lang="en-US" sz="1100" dirty="0">
+                          <a:solidFill>
+                            <a:schemeClr val="accent6"/>
+                          </a:solidFill>
+                        </a:rPr>
+                        <a:t>0x03</a:t>
+                      </a:r>
+                    </a:p>
+                  </a:txBody>
+                  <a:tcPr/>
+                </a:tc>
+                <a:tc>
+                  <a:txBody>
+                    <a:bodyPr/>
+                    <a:lstStyle/>
+                    <a:p>
+                      <a:pPr algn="ctr"/>
+                      <a:r>
+                        <a:rPr lang="en-US" sz="1100" dirty="0">
+                          <a:solidFill>
+                            <a:schemeClr val="accent6"/>
+                          </a:solidFill>
+                        </a:rPr>
+                        <a:t>10110001</a:t>
+                      </a:r>
+                    </a:p>
+                  </a:txBody>
+                  <a:tcPr/>
+                </a:tc>
+                <a:extLst>
+                  <a:ext uri="{0D108BD9-81ED-4DB2-BD59-A6C34878D82A}">
+                    <a16:rowId xmlns:a16="http://schemas.microsoft.com/office/drawing/2014/main" val="4269031418"/>
+                  </a:ext>
+                </a:extLst>
+              </a:tr>
+              <a:tr h="364171">
+                <a:tc>
+                  <a:txBody>
+                    <a:bodyPr/>
+                    <a:lstStyle/>
+                    <a:p>
+                      <a:pPr algn="ctr"/>
+                      <a:r>
+                        <a:rPr lang="en-US" sz="1100" dirty="0">
+                          <a:solidFill>
+                            <a:schemeClr val="accent6"/>
+                          </a:solidFill>
+                        </a:rPr>
+                        <a:t>…..</a:t>
+                      </a:r>
+                    </a:p>
+                  </a:txBody>
+                  <a:tcPr/>
+                </a:tc>
+                <a:tc>
+                  <a:txBody>
+                    <a:bodyPr/>
+                    <a:lstStyle/>
+                    <a:p>
+                      <a:pPr algn="ctr"/>
+                      <a:r>
+                        <a:rPr lang="en-US" sz="1100" dirty="0">
+                          <a:solidFill>
+                            <a:schemeClr val="accent6"/>
+                          </a:solidFill>
+                        </a:rPr>
+                        <a:t>…….</a:t>
+                      </a:r>
+                    </a:p>
+                  </a:txBody>
+                  <a:tcPr/>
+                </a:tc>
+                <a:extLst>
+                  <a:ext uri="{0D108BD9-81ED-4DB2-BD59-A6C34878D82A}">
+                    <a16:rowId xmlns:a16="http://schemas.microsoft.com/office/drawing/2014/main" val="3959789975"/>
+                  </a:ext>
+                </a:extLst>
+              </a:tr>
+              <a:tr h="364171">
+                <a:tc>
+                  <a:txBody>
+                    <a:bodyPr/>
+                    <a:lstStyle/>
+                    <a:p>
+                      <a:pPr algn="ctr"/>
+                      <a:r>
+                        <a:rPr lang="en-US" sz="1100" dirty="0">
+                          <a:solidFill>
+                            <a:schemeClr val="accent6"/>
+                          </a:solidFill>
+                        </a:rPr>
+                        <a:t>0xFE</a:t>
+                      </a:r>
+                    </a:p>
+                  </a:txBody>
+                  <a:tcPr/>
+                </a:tc>
+                <a:tc>
+                  <a:txBody>
+                    <a:bodyPr/>
+                    <a:lstStyle/>
+                    <a:p>
+                      <a:pPr algn="ctr"/>
+                      <a:r>
+                        <a:rPr lang="en-US" sz="1100" dirty="0">
+                          <a:solidFill>
+                            <a:schemeClr val="accent6"/>
+                          </a:solidFill>
+                        </a:rPr>
+                        <a:t>11110101</a:t>
+                      </a:r>
+                    </a:p>
+                  </a:txBody>
+                  <a:tcPr/>
+                </a:tc>
+                <a:extLst>
+                  <a:ext uri="{0D108BD9-81ED-4DB2-BD59-A6C34878D82A}">
+                    <a16:rowId xmlns:a16="http://schemas.microsoft.com/office/drawing/2014/main" val="478438285"/>
+                  </a:ext>
+                </a:extLst>
+              </a:tr>
+              <a:tr h="364171">
+                <a:tc>
+                  <a:txBody>
+                    <a:bodyPr/>
+                    <a:lstStyle/>
+                    <a:p>
+                      <a:pPr algn="ctr"/>
+                      <a:r>
+                        <a:rPr lang="en-US" sz="1100" dirty="0">
+                          <a:solidFill>
+                            <a:schemeClr val="accent6"/>
+                          </a:solidFill>
+                        </a:rPr>
+                        <a:t>0xFF</a:t>
+                      </a:r>
+                    </a:p>
+                  </a:txBody>
+                  <a:tcPr/>
+                </a:tc>
+                <a:tc>
+                  <a:txBody>
+                    <a:bodyPr/>
+                    <a:lstStyle/>
+                    <a:p>
+                      <a:pPr algn="ctr"/>
+                      <a:r>
+                        <a:rPr lang="en-US" sz="1100" dirty="0">
+                          <a:solidFill>
+                            <a:schemeClr val="accent6"/>
+                          </a:solidFill>
+                        </a:rPr>
+                        <a:t>00010100</a:t>
+                      </a:r>
+                    </a:p>
+                  </a:txBody>
+                  <a:tcPr/>
+                </a:tc>
+                <a:extLst>
+                  <a:ext uri="{0D108BD9-81ED-4DB2-BD59-A6C34878D82A}">
+                    <a16:rowId xmlns:a16="http://schemas.microsoft.com/office/drawing/2014/main" val="2997991741"/>
+                  </a:ext>
+                </a:extLst>
+              </a:tr>
+            </a:tbl>
+          </a:graphicData>
+        </a:graphic>
+      </p:graphicFrame>
     </p:spTree>
     <p:extLst>
       <p:ext uri="{BB962C8B-B14F-4D97-AF65-F5344CB8AC3E}">
@@ -14750,12 +15089,12 @@
               <a:buNone/>
             </a:pPr>
             <a:r>
-              <a:rPr lang="en" sz="1100">
+              <a:rPr lang="en" sz="1100" dirty="0">
                 <a:solidFill>
                   <a:schemeClr val="accent3"/>
                 </a:solidFill>
               </a:rPr>
-              <a:t>1</a:t>
+              <a:t>2</a:t>
             </a:r>
             <a:endParaRPr lang="en" dirty="0">
               <a:solidFill>
@@ -16208,12 +16547,12 @@
               <a:buNone/>
             </a:pPr>
             <a:r>
-              <a:rPr lang="en" sz="1100">
+              <a:rPr lang="en" sz="1100" dirty="0">
                 <a:solidFill>
                   <a:schemeClr val="accent3"/>
                 </a:solidFill>
               </a:rPr>
-              <a:t>1</a:t>
+              <a:t>3</a:t>
             </a:r>
             <a:endParaRPr lang="en" dirty="0">
               <a:solidFill>
@@ -17729,12 +18068,12 @@
               <a:buNone/>
             </a:pPr>
             <a:r>
-              <a:rPr lang="en" sz="1100">
+              <a:rPr lang="en" sz="1100" dirty="0">
                 <a:solidFill>
                   <a:schemeClr val="accent3"/>
                 </a:solidFill>
               </a:rPr>
-              <a:t>1</a:t>
+              <a:t>4</a:t>
             </a:r>
             <a:endParaRPr lang="en" dirty="0">
               <a:solidFill>
@@ -19571,12 +19910,12 @@
               <a:buNone/>
             </a:pPr>
             <a:r>
-              <a:rPr lang="en" sz="1100">
+              <a:rPr lang="en" sz="1100" dirty="0">
                 <a:solidFill>
                   <a:schemeClr val="accent3"/>
                 </a:solidFill>
               </a:rPr>
-              <a:t>1</a:t>
+              <a:t>5</a:t>
             </a:r>
             <a:endParaRPr lang="en" dirty="0">
               <a:solidFill>
@@ -21260,7 +21599,7 @@
                   <a:schemeClr val="accent3"/>
                 </a:solidFill>
               </a:rPr>
-              <a:t>2</a:t>
+              <a:t>6</a:t>
             </a:r>
             <a:endParaRPr lang="en" dirty="0">
               <a:solidFill>
@@ -23348,12 +23687,12 @@
               <a:buNone/>
             </a:pPr>
             <a:r>
-              <a:rPr lang="en" sz="1100">
+              <a:rPr lang="en" sz="1100" dirty="0">
                 <a:solidFill>
                   <a:schemeClr val="accent3"/>
                 </a:solidFill>
               </a:rPr>
-              <a:t>1</a:t>
+              <a:t>7</a:t>
             </a:r>
             <a:endParaRPr lang="en" dirty="0">
               <a:solidFill>
